--- a/examples/EVM1110E_W13/EVM1110E_W13_SMP_KAP.pptx
+++ b/examples/EVM1110E_W13/EVM1110E_W13_SMP_KAP.pptx
@@ -527,7 +527,7 @@
           <a:p>
             <a:r>
               <a:rPr lang="en-US" dirty="0"/>
-              <a:t>Slide 1 (dàn ý #1). Mở Phần 4 — buổi xưởng. Nhắc SV đã mang đủ các trang SMP (Buổi 1, 7–12). Điền tên giảng viên trước khi dạy.
+              <a:t>Slide 1 (dàn ý #1). Mở Phần 4 — buổi xưởng. Nhắc SV đã mang đủ các trang SMP (Buổi 1, 7–12).
 Alt-text: hai vòng tròn đồng tâm — lõi là Key Account Plan, vòng ngoài là nhà tài trợ, nhà cung cấp, báo chí – KOL.</a:t>
             </a:r>
             <a:endParaRPr lang="en-US" dirty="0"/>
@@ -3629,7 +3629,7 @@
                 <a:ea typeface="Alexandria" pitchFamily="34" charset="-122"/>
                 <a:cs typeface="Alexandria" pitchFamily="34" charset="-120"/>
               </a:rPr>
-              <a:t>Giảng viên: [Tên giảng viên]</a:t>
+              <a:t>Giảng viên: Đoàn Nguyễn Bảo Quyên</a:t>
             </a:r>
             <a:endParaRPr lang="en-US" sz="1500" dirty="0"/>
           </a:p>
